--- a/ppt/out/WLC2급_제09강_존엄한의료결정·사전돌봄계획과후견.pptx
+++ b/ppt/out/WLC2급_제09강_존엄한의료결정·사전돌봄계획과후견.pptx
@@ -158,7 +158,7 @@
   <p:extLst>
     <p:ext uri="{521415D9-36F7-43E2-AB2F-B90AF26B5E84}">
       <p14:sectionLst xmlns:p14="http://schemas.microsoft.com/office/powerpoint/2010/main">
-        <p14:section name="열기" id="{580e3aac-ef22-7754-1862-772d8313d9a4}">
+        <p14:section name="열기" id="{e2814e01-3bf6-0fb1-034e-936f55c4c2dc}">
           <p14:sldIdLst>
             <p14:sldId id="256"/>
             <p14:sldId id="257"/>
@@ -171,7 +171,7 @@
             <p14:sldId id="264"/>
           </p14:sldIdLst>
         </p14:section>
-        <p14:section name="1교시 연명의료결정제도의 언어" id="{c4d67f99-3323-89dc-6aab-58747b03d362}">
+        <p14:section name="1교시 연명의료결정제도의 언어" id="{3effc509-e2ad-926d-5264-c7bd218069d4}">
           <p14:sldIdLst>
             <p14:sldId id="265"/>
             <p14:sldId id="266"/>
@@ -184,7 +184,7 @@
             <p14:sldId id="273"/>
           </p14:sldIdLst>
         </p14:section>
-        <p14:section name="2교시 ACP·호스피스·후견" id="{c4a1b806-2f98-3f48-5e3b-4f5b32897a56}">
+        <p14:section name="2교시 ACP·호스피스·후견" id="{5ca036e0-a364-a30b-7bbe-a4590891337c}">
           <p14:sldIdLst>
             <p14:sldId id="274"/>
             <p14:sldId id="275"/>
@@ -200,7 +200,7 @@
             <p14:sldId id="285"/>
           </p14:sldIdLst>
         </p14:section>
-        <p14:section name="3교시 나의 의료·돌봄 가치 설계" id="{d0118a3c-25a8-9015-95c8-5d871cc18b41}">
+        <p14:section name="3교시 나의 의료·돌봄 가치 설계" id="{14890d17-c75e-d56d-2d6f-4cbae7fa39de}">
           <p14:sldIdLst>
             <p14:sldId id="286"/>
             <p14:sldId id="287"/>
@@ -220,7 +220,7 @@
             <p14:sldId id="301"/>
           </p14:sldIdLst>
         </p14:section>
-        <p14:section name="정리와 예고" id="{04b9467d-4b97-dcbe-4d0b-4690583d0db7}">
+        <p14:section name="정리와 예고" id="{4e31f919-9984-2f25-503e-cdaf2e5e4aa8}">
           <p14:sldIdLst>
             <p14:sldId id="302"/>
             <p14:sldId id="303"/>
@@ -6382,8 +6382,8 @@
         </p:nvSpPr>
         <p:spPr>
           <a:xfrm>
-            <a:off x="548640" y="2560320"/>
-            <a:ext cx="9144000" cy="1097280"/>
+            <a:off x="548640" y="2514600"/>
+            <a:ext cx="10607040" cy="1828800"/>
           </a:xfrm>
           <a:prstGeom prst="rect">
             <a:avLst/>
@@ -6421,7 +6421,7 @@
         </p:nvSpPr>
         <p:spPr>
           <a:xfrm>
-            <a:off x="548640" y="3703320"/>
+            <a:off x="548640" y="4434840"/>
             <a:ext cx="8229600" cy="411480"/>
           </a:xfrm>
           <a:prstGeom prst="rect">
@@ -6457,7 +6457,7 @@
         </p:nvSpPr>
         <p:spPr>
           <a:xfrm>
-            <a:off x="548640" y="5120640"/>
+            <a:off x="548640" y="4983480"/>
             <a:ext cx="8229600" cy="365760"/>
           </a:xfrm>
           <a:prstGeom prst="rect">

--- a/ppt/out/WLC2급_제09강_존엄한의료결정·사전돌봄계획과후견.pptx
+++ b/ppt/out/WLC2급_제09강_존엄한의료결정·사전돌봄계획과후견.pptx
@@ -158,7 +158,7 @@
   <p:extLst>
     <p:ext uri="{521415D9-36F7-43E2-AB2F-B90AF26B5E84}">
       <p14:sectionLst xmlns:p14="http://schemas.microsoft.com/office/powerpoint/2010/main">
-        <p14:section name="열기" id="{e2814e01-3bf6-0fb1-034e-936f55c4c2dc}">
+        <p14:section name="열기" id="{310d9600-0fbe-3978-9517-b5817e9978ea}">
           <p14:sldIdLst>
             <p14:sldId id="256"/>
             <p14:sldId id="257"/>
@@ -171,7 +171,7 @@
             <p14:sldId id="264"/>
           </p14:sldIdLst>
         </p14:section>
-        <p14:section name="1교시 연명의료결정제도의 언어" id="{3effc509-e2ad-926d-5264-c7bd218069d4}">
+        <p14:section name="1교시 연명의료결정제도의 언어" id="{19ea7bd3-affe-dcab-16b6-5b58f3026390}">
           <p14:sldIdLst>
             <p14:sldId id="265"/>
             <p14:sldId id="266"/>
@@ -184,7 +184,7 @@
             <p14:sldId id="273"/>
           </p14:sldIdLst>
         </p14:section>
-        <p14:section name="2교시 ACP·호스피스·후견" id="{5ca036e0-a364-a30b-7bbe-a4590891337c}">
+        <p14:section name="2교시 ACP·호스피스·후견" id="{53402c91-c0bf-0d52-5cc9-d6e87059cddc}">
           <p14:sldIdLst>
             <p14:sldId id="274"/>
             <p14:sldId id="275"/>
@@ -200,7 +200,7 @@
             <p14:sldId id="285"/>
           </p14:sldIdLst>
         </p14:section>
-        <p14:section name="3교시 나의 의료·돌봄 가치 설계" id="{14890d17-c75e-d56d-2d6f-4cbae7fa39de}">
+        <p14:section name="3교시 나의 의료·돌봄 가치 설계" id="{7ca70b0d-a180-5095-0cc8-8f39bc91c8a9}">
           <p14:sldIdLst>
             <p14:sldId id="286"/>
             <p14:sldId id="287"/>
@@ -220,7 +220,7 @@
             <p14:sldId id="301"/>
           </p14:sldIdLst>
         </p14:section>
-        <p14:section name="정리와 예고" id="{4e31f919-9984-2f25-503e-cdaf2e5e4aa8}">
+        <p14:section name="정리와 예고" id="{490e14e4-335b-9a56-cd22-999400d69127}">
           <p14:sldIdLst>
             <p14:sldId id="302"/>
             <p14:sldId id="303"/>
@@ -49754,47 +49754,47 @@
 </file>
 
 <file path=ppt/theme/theme1.xml><?xml version="1.0" encoding="utf-8"?>
-<a:theme xmlns:a="http://schemas.openxmlformats.org/drawingml/2006/main" name="WLC Teal">
+<a:theme xmlns:a="http://schemas.openxmlformats.org/drawingml/2006/main" name="Office Theme">
   <a:themeElements>
-    <a:clrScheme name="WLC Teal">
+    <a:clrScheme name="Office">
       <a:dk1>
-        <a:srgbClr val="222222"/>
+        <a:sysClr val="windowText" lastClr="000000"/>
       </a:dk1>
       <a:lt1>
-        <a:srgbClr val="FFFFFF"/>
+        <a:sysClr val="window" lastClr="FFFFFF"/>
       </a:lt1>
       <a:dk2>
-        <a:srgbClr val="1F4E4A"/>
+        <a:srgbClr val="44546A"/>
       </a:dk2>
       <a:lt2>
-        <a:srgbClr val="EAF3F0"/>
+        <a:srgbClr val="E7E6E6"/>
       </a:lt2>
       <a:accent1>
-        <a:srgbClr val="2E7D6B"/>
+        <a:srgbClr val="4472C4"/>
       </a:accent1>
       <a:accent2>
-        <a:srgbClr val="D98E04"/>
+        <a:srgbClr val="ED7D31"/>
       </a:accent2>
       <a:accent3>
-        <a:srgbClr val="3A6EA5"/>
+        <a:srgbClr val="A5A5A5"/>
       </a:accent3>
       <a:accent4>
-        <a:srgbClr val="B5452F"/>
+        <a:srgbClr val="FFC000"/>
       </a:accent4>
       <a:accent5>
-        <a:srgbClr val="8FB9A8"/>
+        <a:srgbClr val="5B9BD5"/>
       </a:accent5>
       <a:accent6>
-        <a:srgbClr val="6B6B6B"/>
+        <a:srgbClr val="70AD47"/>
       </a:accent6>
       <a:hlink>
-        <a:srgbClr val="3A6EA5"/>
+        <a:srgbClr val="0563C1"/>
       </a:hlink>
       <a:folHlink>
-        <a:srgbClr val="1F4E4A"/>
+        <a:srgbClr val="954F72"/>
       </a:folHlink>
     </a:clrScheme>
-    <a:fontScheme name="WLC Teal">
+    <a:fontScheme name="Office">
       <a:majorFont>
         <a:latin typeface="Noto Serif KR Black"/>
         <a:ea typeface=""/>

--- a/ppt/out/WLC2급_제09강_존엄한의료결정·사전돌봄계획과후견.pptx
+++ b/ppt/out/WLC2급_제09강_존엄한의료결정·사전돌봄계획과후견.pptx
@@ -158,7 +158,7 @@
   <p:extLst>
     <p:ext uri="{521415D9-36F7-43E2-AB2F-B90AF26B5E84}">
       <p14:sectionLst xmlns:p14="http://schemas.microsoft.com/office/powerpoint/2010/main">
-        <p14:section name="열기" id="{310d9600-0fbe-3978-9517-b5817e9978ea}">
+        <p14:section name="열기" id="{cebcb480-6d1c-6934-ba4d-c9ab5244fe34}">
           <p14:sldIdLst>
             <p14:sldId id="256"/>
             <p14:sldId id="257"/>
@@ -171,7 +171,7 @@
             <p14:sldId id="264"/>
           </p14:sldIdLst>
         </p14:section>
-        <p14:section name="1교시 연명의료결정제도의 언어" id="{19ea7bd3-affe-dcab-16b6-5b58f3026390}">
+        <p14:section name="1교시 연명의료결정제도의 언어" id="{9b8777b4-3ee9-c2ef-bff1-7681e265ac30}">
           <p14:sldIdLst>
             <p14:sldId id="265"/>
             <p14:sldId id="266"/>
@@ -184,7 +184,7 @@
             <p14:sldId id="273"/>
           </p14:sldIdLst>
         </p14:section>
-        <p14:section name="2교시 ACP·호스피스·후견" id="{53402c91-c0bf-0d52-5cc9-d6e87059cddc}">
+        <p14:section name="2교시 ACP·호스피스·후견" id="{8568acbe-c62d-f3af-4ce9-90d1d53558b2}">
           <p14:sldIdLst>
             <p14:sldId id="274"/>
             <p14:sldId id="275"/>
@@ -200,7 +200,7 @@
             <p14:sldId id="285"/>
           </p14:sldIdLst>
         </p14:section>
-        <p14:section name="3교시 나의 의료·돌봄 가치 설계" id="{7ca70b0d-a180-5095-0cc8-8f39bc91c8a9}">
+        <p14:section name="3교시 나의 의료·돌봄 가치 설계" id="{a87af8c9-e731-9be2-3799-358ee718b02b}">
           <p14:sldIdLst>
             <p14:sldId id="286"/>
             <p14:sldId id="287"/>
@@ -220,7 +220,7 @@
             <p14:sldId id="301"/>
           </p14:sldIdLst>
         </p14:section>
-        <p14:section name="정리와 예고" id="{490e14e4-335b-9a56-cd22-999400d69127}">
+        <p14:section name="정리와 예고" id="{1b38c6db-33ec-1490-70aa-a4eebb7a6af6}">
           <p14:sldIdLst>
             <p14:sldId id="302"/>
             <p14:sldId id="303"/>
@@ -49754,47 +49754,47 @@
 </file>
 
 <file path=ppt/theme/theme1.xml><?xml version="1.0" encoding="utf-8"?>
-<a:theme xmlns:a="http://schemas.openxmlformats.org/drawingml/2006/main" name="Office Theme">
+<a:theme xmlns:a="http://schemas.openxmlformats.org/drawingml/2006/main" name="WLC Teal">
   <a:themeElements>
-    <a:clrScheme name="Office">
+    <a:clrScheme name="WLC Teal">
       <a:dk1>
-        <a:sysClr val="windowText" lastClr="000000"/>
+        <a:srgbClr val="222222"/>
       </a:dk1>
       <a:lt1>
-        <a:sysClr val="window" lastClr="FFFFFF"/>
+        <a:srgbClr val="FFFFFF"/>
       </a:lt1>
       <a:dk2>
-        <a:srgbClr val="44546A"/>
+        <a:srgbClr val="1F4E4A"/>
       </a:dk2>
       <a:lt2>
-        <a:srgbClr val="E7E6E6"/>
+        <a:srgbClr val="EAF3F0"/>
       </a:lt2>
       <a:accent1>
-        <a:srgbClr val="4472C4"/>
+        <a:srgbClr val="2E7D6B"/>
       </a:accent1>
       <a:accent2>
-        <a:srgbClr val="ED7D31"/>
+        <a:srgbClr val="D98E04"/>
       </a:accent2>
       <a:accent3>
-        <a:srgbClr val="A5A5A5"/>
+        <a:srgbClr val="3A6EA5"/>
       </a:accent3>
       <a:accent4>
-        <a:srgbClr val="FFC000"/>
+        <a:srgbClr val="B5452F"/>
       </a:accent4>
       <a:accent5>
-        <a:srgbClr val="5B9BD5"/>
+        <a:srgbClr val="8FB9A8"/>
       </a:accent5>
       <a:accent6>
-        <a:srgbClr val="70AD47"/>
+        <a:srgbClr val="6B6B6B"/>
       </a:accent6>
       <a:hlink>
-        <a:srgbClr val="0563C1"/>
+        <a:srgbClr val="3A6EA5"/>
       </a:hlink>
       <a:folHlink>
-        <a:srgbClr val="954F72"/>
+        <a:srgbClr val="1F4E4A"/>
       </a:folHlink>
     </a:clrScheme>
-    <a:fontScheme name="Office">
+    <a:fontScheme name="WLC Teal">
       <a:majorFont>
         <a:latin typeface="Noto Serif KR Black"/>
         <a:ea typeface=""/>
